--- a/docs/presentation/在线购物系统-第2次阶段性评审报告.pptx
+++ b/docs/presentation/在线购物系统-第2次阶段性评审报告.pptx
@@ -292,7 +292,9 @@
           <a:bodyPr/>
           <a:lstStyle/>
           <a:p>
-            <a:endParaRPr lang="en-US" dirty="0"/>
+            <a:r>
+              <a:t>开场：各位老师好，我们是第 3 组，本次是第 2 次阶段性评审，讲的是迭代 2（10-09 至 10-22）的进展。</a:t>
+            </a:r>
           </a:p>
         </p:txBody>
       </p:sp>
@@ -376,7 +378,9 @@
           <a:bodyPr/>
           <a:lstStyle/>
           <a:p>
-            <a:endParaRPr lang="en-US" dirty="0"/>
+            <a:r>
+              <a:t>演示环节请配合实机操作：卖家登录 → 发布商品 → 买家提交意向拿口令码 → 凭码查询位次 → 卖家查看意向人。顺带讲一个真实缺陷定位案例：nginx 转发丢失 Host 端口，导致浏览器请求被误判跨域返回 403；命令行 curl 不带 Origin 头所以不复现，最后靠对比请求头定位到根因。</a:t>
+            </a:r>
           </a:p>
         </p:txBody>
       </p:sp>
@@ -460,7 +464,9 @@
           <a:bodyPr/>
           <a:lstStyle/>
           <a:p>
-            <a:endParaRPr lang="en-US" dirty="0"/>
+            <a:r>
+              <a:t>当前进度约 65%（依据：需求工程全部完成 + 迭代 2 交付约 60/86 故事点）。下一步补齐挑战需求：交易闭环（队首进入交易自动冻结、标记成交/失败、失败后作废或重新排队）、意向修改与撤销、历史商品的意向结果追溯。</a:t>
+            </a:r>
           </a:p>
         </p:txBody>
       </p:sp>
@@ -544,7 +550,9 @@
           <a:bodyPr/>
           <a:lstStyle/>
           <a:p>
-            <a:endParaRPr lang="en-US" dirty="0"/>
+            <a:r>
+              <a:t>以上是第 3 组第 2 次评审汇报，请老师提问与指正。</a:t>
+            </a:r>
           </a:p>
         </p:txBody>
       </p:sp>
@@ -628,7 +636,9 @@
           <a:bodyPr/>
           <a:lstStyle/>
           <a:p>
-            <a:endParaRPr lang="en-US" dirty="0"/>
+            <a:r>
+              <a:t>本次讲述分 8 个板块：项目概况、迭代目标、任务与成果物、成员产出、关键技术、质量保障、构建部署、演示与进度。</a:t>
+            </a:r>
           </a:p>
         </p:txBody>
       </p:sp>
@@ -712,7 +722,9 @@
           <a:bodyPr/>
           <a:lstStyle/>
           <a:p>
-            <a:endParaRPr lang="en-US" dirty="0"/>
+            <a:r>
+              <a:t>需求工程已完成：30 个用户故事、86 个故事点，7 次迭代与 7 次评审一一对应。方法上采用 Scrum 迭代开发 + 动态 Product Backlog。要点：为满足课程基线需求验收，本轮提前交付了原规划于迭代 3 的买家主流程。</a:t>
+            </a:r>
           </a:p>
         </p:txBody>
       </p:sp>
@@ -796,7 +808,9 @@
           <a:bodyPr/>
           <a:lstStyle/>
           <a:p>
-            <a:endParaRPr lang="en-US" dirty="0"/>
+            <a:r>
+              <a:t>本轮 4 个目标：完成基线核心功能；打通前后端主流程；建立自动化测试；完成成果验收 5 类成果物。全部达成，这也是后面逐页要证明的。</a:t>
+            </a:r>
           </a:p>
         </p:txBody>
       </p:sp>
@@ -880,7 +894,9 @@
           <a:bodyPr/>
           <a:lstStyle/>
           <a:p>
-            <a:endParaRPr lang="en-US" dirty="0"/>
+            <a:r>
+              <a:t>本轮共 16 项任务全部完成，本页按模块归并成 10 项关键任务展示。提醒：任务与完成人都能在 GitHub commit 里追溯到。</a:t>
+            </a:r>
           </a:p>
         </p:txBody>
       </p:sp>
@@ -964,7 +980,9 @@
           <a:bodyPr/>
           <a:lstStyle/>
           <a:p>
-            <a:endParaRPr lang="en-US" dirty="0"/>
+            <a:r>
+              <a:t>这一页是重点。每人独立完成、都有可公网访问的成果物：高佳豪（骨架/状态机/Docker/评审材料）、李帆（持久化/卖家接口/意向接口/查询接口）、范与恒（卖家后台四页面与会话管理）、林炜博（买家端四页面并完成接口对接）、叶文锦（103 个自动化用例与缺陷闭环）。若时间够，可请每位成员各讲一句自己做了什么。</a:t>
+            </a:r>
           </a:p>
         </p:txBody>
       </p:sp>
@@ -1048,7 +1066,9 @@
           <a:bodyPr/>
           <a:lstStyle/>
           <a:p>
-            <a:endParaRPr lang="en-US" dirty="0"/>
+            <a:r>
+              <a:t>三个技术点里最值得讲的是前两个：商品状态机只有在售 / 已冻结 / 已下架三个状态，冻结可以回退到在售，非法流转一律拒绝，把「一件商品同时只能被一个人谈」的独占性写进代码；口令码排队实现免登录提交、8 位唯一口令码、按提交时间算位次，并在提交时锁商品行以支撑并发。</a:t>
+            </a:r>
           </a:p>
         </p:txBody>
       </p:sp>
@@ -1132,7 +1152,9 @@
           <a:bodyPr/>
           <a:lstStyle/>
           <a:p>
-            <a:endParaRPr lang="en-US" dirty="0"/>
+            <a:r>
+              <a:t>质量这块用数字说：103 个自动化用例、0 失败 0 错误；接口测试走真实 HTTP 调用而非 mock。缺陷登记 4 条（3 个缺陷 + 1 条风险）全部闭环，可以举例 BUG-02（高危：发布接口缺登录校验）与 NOTE-01（多行查询异常）。</a:t>
+            </a:r>
           </a:p>
         </p:txBody>
       </p:sp>
@@ -1216,7 +1238,9 @@
           <a:bodyPr/>
           <a:lstStyle/>
           <a:p>
-            <a:endParaRPr lang="en-US" dirty="0"/>
+            <a:r>
+              <a:t>验收 5 类成果物已全部就绪。部署这块特别说明：考虑到网络环境，我们提供的是离线镜像包，docker load 之后一条 compose 命令即可启动，不需要联网也不需要在目标机器上重新构建。</a:t>
+            </a:r>
           </a:p>
         </p:txBody>
       </p:sp>
@@ -3234,7 +3258,7 @@
                 <a:ea typeface="Calibri" pitchFamily="34" charset="-122"/>
                 <a:cs typeface="Calibri" pitchFamily="34" charset="-120"/>
               </a:rPr>
-              <a:t>剩余：挑战需求（排队位次、意向修改 / 撤销、失败作废重排、历史追溯）。</a:t>
+              <a:t>剩余：意向修改 / 撤销（US-08、US-09）、失败后作废或重新排队、历史商品的意向结果追溯。</a:t>
             </a:r>
             <a:endParaRPr lang="en-US" sz="1050" dirty="0"/>
           </a:p>
@@ -3350,7 +3374,7 @@
                 <a:ea typeface="Calibri" pitchFamily="34" charset="-122"/>
                 <a:cs typeface="Calibri" pitchFamily="34" charset="-120"/>
               </a:rPr>
-              <a:t>迭代 3～5</a:t>
+              <a:t>迭代 3～4</a:t>
             </a:r>
             <a:endParaRPr lang="en-US" sz="1100" dirty="0"/>
           </a:p>
@@ -3394,7 +3418,7 @@
                 <a:ea typeface="Calibri" pitchFamily="34" charset="-122"/>
                 <a:cs typeface="Calibri" pitchFamily="34" charset="-120"/>
               </a:rPr>
-              <a:t>买家主流程与挑战需求：多意向排队位次、意向撤销 / 修改、失败作废与重新排队、历史商品追溯</a:t>
+              <a:t>买家侧挑战需求与交易闭环：队首进入交易自动冻结、标记成交 / 失败、失败后作废或重新排队</a:t>
             </a:r>
             <a:endParaRPr lang="en-US" sz="1050" dirty="0"/>
           </a:p>
@@ -3435,7 +3459,7 @@
                 <a:ea typeface="Calibri" pitchFamily="34" charset="-122"/>
                 <a:cs typeface="Calibri" pitchFamily="34" charset="-120"/>
               </a:rPr>
-              <a:t>迭代 4 补充</a:t>
+              <a:t>迭代 5～7</a:t>
             </a:r>
             <a:endParaRPr lang="en-US" sz="1100" dirty="0"/>
           </a:p>
@@ -3479,7 +3503,7 @@
                 <a:ea typeface="Calibri" pitchFamily="34" charset="-122"/>
                 <a:cs typeface="Calibri" pitchFamily="34" charset="-120"/>
               </a:rPr>
-              <a:t>交易闭环：队首进入交易自动冻结、卖家标记成交 / 失败、失败后恢复上线</a:t>
+              <a:t>查询与历史增强（撤销意向、意向结果追溯）→ 覆盖面扩充与回归自动化 → 最终验收材料与运行录屏</a:t>
             </a:r>
             <a:endParaRPr lang="en-US" sz="1050" dirty="0"/>
           </a:p>
@@ -3564,7 +3588,7 @@
                 <a:ea typeface="Calibri" pitchFamily="34" charset="-122"/>
                 <a:cs typeface="Calibri" pitchFamily="34" charset="-120"/>
               </a:rPr>
-              <a:t>需求池 v2（基线 / 挑战分类）、覆盖率提升、回归自动化与最终验收材料</a:t>
+              <a:t>需求池 v2（基线 / 挑战分类）、每迭代 Backlog Refinement、缺陷回归</a:t>
             </a:r>
             <a:endParaRPr lang="en-US" sz="1050" dirty="0"/>
           </a:p>
@@ -4330,7 +4354,7 @@
                 <a:ea typeface="Calibri" pitchFamily="34" charset="-122"/>
                 <a:cs typeface="Calibri" pitchFamily="34" charset="-120"/>
               </a:rPr>
-              <a:t>14 项任务的推进结果</a:t>
+              <a:t>16 项任务的推进结果</a:t>
             </a:r>
             <a:endParaRPr lang="en-US" sz="1050" dirty="0"/>
           </a:p>
@@ -6771,7 +6795,7 @@
                 <a:ea typeface="Calibri" pitchFamily="34" charset="-122"/>
                 <a:cs typeface="Calibri" pitchFamily="34" charset="-120"/>
               </a:rPr>
-              <a:t>共 14 项任务，全部完成（含为基线验收提前交付的内容）</a:t>
+              <a:t>共 16 项任务全部完成（下表按模块归并为 10 项，含为基线验收提前交付的内容）</a:t>
             </a:r>
             <a:endParaRPr lang="en-US" sz="1200" dirty="0"/>
           </a:p>
@@ -9453,7 +9477,7 @@
                 <a:ea typeface="Calibri" pitchFamily="34" charset="-122"/>
                 <a:cs typeface="Calibri" pitchFamily="34" charset="-120"/>
               </a:rPr>
-              <a:t>项目骨架；商品状态机与四态流转；单件在售约束；Docker 化与部署手册；评审与验收材料</a:t>
+              <a:t>项目骨架；商品状态机与三态流转；单件在售约束；Docker 化与部署手册；评审与验收材料</a:t>
             </a:r>
             <a:endParaRPr lang="en-US" sz="1050" dirty="0"/>
           </a:p>
@@ -10553,7 +10577,7 @@
                 <a:ea typeface="Calibri" pitchFamily="34" charset="-122"/>
                 <a:cs typeface="Calibri" pitchFamily="34" charset="-120"/>
               </a:rPr>
-              <a:t>在售 / 已冻结 / 已下架 / 恢复在售四态流转；非法流转直接抛异常，把「一件商品只能被一个人谈」的独占性写进代码。</a:t>
+              <a:t>在售 / 已冻结 / 已下架三态流转（冻结可回退在售）；非法流转直接抛异常，把「只能一个人谈」写进代码。</a:t>
             </a:r>
             <a:endParaRPr lang="en-US" sz="1100" dirty="0"/>
           </a:p>
@@ -11641,7 +11665,7 @@
                 <a:ea typeface="Cambria" pitchFamily="34" charset="-122"/>
                 <a:cs typeface="Cambria" pitchFamily="34" charset="-120"/>
               </a:rPr>
-              <a:t>7</a:t>
+              <a:t>4</a:t>
             </a:r>
             <a:endParaRPr lang="en-US" sz="4200" dirty="0"/>
           </a:p>
@@ -11823,7 +11847,7 @@
                 <a:ea typeface="Calibri" pitchFamily="34" charset="-122"/>
                 <a:cs typeface="Calibri" pitchFamily="34" charset="-120"/>
               </a:rPr>
-              <a:t>缺陷登记 7 条，均已闭环：BUG-02（高危，发布接口缺登录校验）、BUG-01（中危，me 接口返回空）、NOTE-01（selectOne 多行异常）修复后回归通过。</a:t>
+              <a:t>缺陷登记 4 条（3 个缺陷 + 1 条风险），均已闭环：BUG-02（高危，发布接口缺登录校验）、BUG-01（中危，me 接口返回空）、RISK-01（明文密码）、NOTE-01（selectOne 多行异常）修复后回归通过。</a:t>
             </a:r>
             <a:endParaRPr lang="en-US" sz="1150" dirty="0"/>
           </a:p>
